--- a/templates/office/EMP_IMP_090_시범운영결과보고서.pptx
+++ b/templates/office/EMP_IMP_090_시범운영결과보고서.pptx
@@ -3162,7 +3162,7 @@
               </a:defRPr>
             </a:pPr>
             <a:r>
-              <a:t>HANBIT GLOBAL SyncGuard AI</a:t>
+              <a:t>HANBIT GLOBAL SyncFlow AI</a:t>
             </a:r>
           </a:p>
           <a:p>
@@ -3192,7 +3192,7 @@
               </a:defRPr>
             </a:pPr>
             <a:r>
-              <a:t>루미에르·벨르코어 파일럿 운영 실적, AI 심의 정확도 검증 및 전사 본 오픈 전환 판정</a:t>
+              <a:t>전장시스템·배터리모듈 파일럿 운영 실적, AI 검증 정확도 검증 및 전사 본 오픈 전환 판정</a:t>
             </a:r>
           </a:p>
         </p:txBody>
@@ -3212,11 +3212,11 @@
             <a:avLst/>
           </a:prstGeom>
           <a:solidFill>
-            <a:srgbClr val="1E293B"/>
+            <a:srgbClr val="0F2942"/>
           </a:solidFill>
           <a:ln>
             <a:solidFill>
-              <a:srgbClr val="334155"/>
+              <a:srgbClr val="1E3A5F"/>
             </a:solidFill>
           </a:ln>
         </p:spPr>
@@ -3284,7 +3284,7 @@
               </a:defRPr>
             </a:pPr>
             <a:r>
-              <a:t>운영 기간: 2026.09.28 ~ 2026.10.12 (2주간)  |  시범 대상: 루미에르, 벨르코어 마케팅팀 및 RA팀</a:t>
+              <a:t>운영 기간: 2026.09.28 ~ 2026.10.12 (2주간)  |  시범 대상: 전장시스템, 배터리모듈 구매조달팀 및 QA팀</a:t>
             </a:r>
           </a:p>
           <a:p>
@@ -3394,7 +3394,7 @@
               </a:defRPr>
             </a:pPr>
             <a:r>
-              <a:t>SyncGuard AI 시범운영 결과보고서  &gt;  1. 시범운영 개요</a:t>
+              <a:t>SyncFlow AI 시범운영 결과보고서  &gt;  1. 시범운영 개요</a:t>
             </a:r>
           </a:p>
         </p:txBody>
@@ -3459,7 +3459,7 @@
             <a:pPr algn="r">
               <a:defRPr sz="1000" b="1">
                 <a:solidFill>
-                  <a:srgbClr val="1E293B"/>
+                  <a:srgbClr val="0F2942"/>
                 </a:solidFill>
               </a:defRPr>
             </a:pPr>
@@ -3544,7 +3544,7 @@
               </a:defRPr>
             </a:pPr>
             <a:r>
-              <a:t>SyncGuard AI | 파일럿 운영 실적 및 본 오픈 전환 적합성 판정 보고서</a:t>
+              <a:t>SyncFlow AI | 파일럿 운영 실적 및 본 오픈 전환 적합성 판정 보고서</a:t>
             </a:r>
           </a:p>
         </p:txBody>
@@ -3690,7 +3690,7 @@
               </a:defRPr>
             </a:pPr>
             <a:r>
-              <a:t>총 심의 처리 건수</a:t>
+              <a:t>총 검증 처리 건수</a:t>
             </a:r>
           </a:p>
           <a:p>
@@ -3715,12 +3715,12 @@
               </a:spcBef>
               <a:defRPr sz="1000">
                 <a:solidFill>
-                  <a:srgbClr val="334155"/>
+                  <a:srgbClr val="1E3A5F"/>
                 </a:solidFill>
               </a:defRPr>
             </a:pPr>
             <a:r>
-              <a:t>루미에르 78건, 벨르코어 64건</a:t>
+              <a:t>전장시스템본부 78건, 정밀기계본부 64건</a:t>
             </a:r>
             <a:br/>
             <a:r>
@@ -3804,7 +3804,7 @@
               </a:defRPr>
             </a:pPr>
             <a:r>
-              <a:t>심의 리드타임 단축</a:t>
+              <a:t>검증 리드타임 단축</a:t>
             </a:r>
           </a:p>
           <a:p>
@@ -3829,12 +3829,12 @@
               </a:spcBef>
               <a:defRPr sz="1000">
                 <a:solidFill>
-                  <a:srgbClr val="334155"/>
+                  <a:srgbClr val="1E3A5F"/>
                 </a:solidFill>
               </a:defRPr>
             </a:pPr>
             <a:r>
-              <a:t>평균 심의 소요시간 92% 단축</a:t>
+              <a:t>평균 검증 소요시간 92% 단축</a:t>
             </a:r>
             <a:br/>
             <a:r>
@@ -3918,7 +3918,7 @@
               </a:defRPr>
             </a:pPr>
             <a:r>
-              <a:t>AI-RA 판정 일치율</a:t>
+              <a:t>AI-법무·QA 판정 일치율</a:t>
             </a:r>
           </a:p>
           <a:p>
@@ -3943,7 +3943,7 @@
               </a:spcBef>
               <a:defRPr sz="1000">
                 <a:solidFill>
-                  <a:srgbClr val="334155"/>
+                  <a:srgbClr val="1E3A5F"/>
                 </a:solidFill>
               </a:defRPr>
             </a:pPr>
@@ -3976,7 +3976,7 @@
           </a:solidFill>
           <a:ln w="19050">
             <a:solidFill>
-              <a:srgbClr val="1E293B"/>
+              <a:srgbClr val="0F2942"/>
             </a:solidFill>
           </a:ln>
         </p:spPr>
@@ -4027,7 +4027,7 @@
             <a:pPr>
               <a:defRPr b="1" sz="1200">
                 <a:solidFill>
-                  <a:srgbClr val="1E293B"/>
+                  <a:srgbClr val="0F2942"/>
                 </a:solidFill>
               </a:defRPr>
             </a:pPr>
@@ -4042,7 +4042,7 @@
               </a:spcBef>
               <a:defRPr b="1" sz="2200">
                 <a:solidFill>
-                  <a:srgbClr val="1E293B"/>
+                  <a:srgbClr val="0F2942"/>
                 </a:solidFill>
               </a:defRPr>
             </a:pPr>
@@ -4057,16 +4057,16 @@
               </a:spcBef>
               <a:defRPr sz="1000">
                 <a:solidFill>
-                  <a:srgbClr val="334155"/>
+                  <a:srgbClr val="1E3A5F"/>
                 </a:solidFill>
               </a:defRPr>
             </a:pPr>
             <a:r>
-              <a:t>마케터 만족도 4.8점</a:t>
+              <a:t>구매담당자 만족도 4.8점</a:t>
             </a:r>
             <a:br/>
             <a:r>
-              <a:t>RA 전문가 만족도 4.6점</a:t>
+              <a:t>법무·QA 전문위원 만족도 4.6점</a:t>
             </a:r>
           </a:p>
         </p:txBody>
